--- a/ai-support-automation/docs/ai-support-automation-executive-deck.pptx
+++ b/ai-support-automation/docs/ai-support-automation-executive-deck.pptx
@@ -3074,7 +3074,7 @@
                 <a:ea typeface="Cambria" pitchFamily="34" charset="-122"/>
                 <a:cs typeface="Cambria" pitchFamily="34" charset="-120"/>
               </a:rPr>
-              <a:t>Rank the interventions before buying any of them</a:t>
+              <a:t>Rank the interventions before buying</a:t>
             </a:r>
             <a:endParaRPr lang="en-US" sz="3800" dirty="0"/>
           </a:p>
@@ -3113,7 +3113,7 @@
                 <a:ea typeface="Calibri" pitchFamily="34" charset="-122"/>
                 <a:cs typeface="Calibri" pitchFamily="34" charset="-120"/>
               </a:rPr>
-              <a:t>The instinct in an AI program is to spend on model quality. Here it is the fourth-best use of the next dollar.</a:t>
+              <a:t>The instinct is to spend on model quality. Here that is the fourth-best use of the next dollar.</a:t>
             </a:r>
             <a:endParaRPr lang="en-US" sz="1700" dirty="0"/>
           </a:p>
@@ -3649,7 +3649,7 @@
                 <a:ea typeface="Cambria" pitchFamily="34" charset="-122"/>
                 <a:cs typeface="Cambria" pitchFamily="34" charset="-120"/>
               </a:rPr>
-              <a:t>The business-case number is unreachable in principle</a:t>
+              <a:t>The business case is unreachable</a:t>
             </a:r>
             <a:endParaRPr lang="en-US" sz="3800" dirty="0"/>
           </a:p>
@@ -4366,7 +4366,7 @@
                 <a:ea typeface="Cambria" pitchFamily="34" charset="-122"/>
                 <a:cs typeface="Cambria" pitchFamily="34" charset="-120"/>
               </a:rPr>
-              <a:t>What we assumed, and what would change the answer</a:t>
+              <a:t>What we assumed, and what would change it</a:t>
             </a:r>
             <a:endParaRPr lang="en-US" sz="3800" dirty="0"/>
           </a:p>
